--- a/assets/figures-editable/c1-c2/c1-e04.pptx
+++ b/assets/figures-editable/c1-c2/c1-e04.pptx
@@ -7,7 +7,7 @@
   <p:sldIdLst>
     <p:sldId id="256" r:id="rId7"/>
   </p:sldIdLst>
-  <p:sldSz cx="11948160" cy="7924799" type="screen4x3"/>
+  <p:sldSz cx="12191695" cy="6858000" type="screen4x3"/>
   <p:notesSz cx="6858000" cy="9144000"/>
   <p:defaultTextStyle>
     <a:defPPr>
@@ -3098,14 +3098,14 @@
       <p:grpSpPr/>
       <p:sp>
         <p:nvSpPr>
-          <p:cNvPr id="2" name="text1" descr="sci-ppt:C1-E04-001"/>
+          <p:cNvPr id="2" name="C1-E04 text 0" descr="sci-ppt:o000"/>
           <p:cNvSpPr txBox="1"/>
           <p:nvPr/>
         </p:nvSpPr>
         <p:spPr>
           <a:xfrm>
-            <a:off x="316992" y="268224"/>
-            <a:ext cx="11277600" cy="359054"/>
+            <a:off x="274320" y="118872"/>
+            <a:ext cx="11612880" cy="340105"/>
           </a:xfrm>
           <a:prstGeom prst="rect">
             <a:avLst/>
@@ -3114,7 +3114,7 @@
           <a:effectLst/>
         </p:spPr>
         <p:txBody>
-          <a:bodyPr wrap="none" lIns="27432" rIns="27432" tIns="18288" bIns="18288" anchor="ctr">
+          <a:bodyPr wrap="none" lIns="18288" rIns="18288" tIns="18288" bIns="18288" anchor="t">
             <a:spAutoFit/>
           </a:bodyPr>
           <a:lstStyle/>
@@ -3125,35 +3125,777 @@
               </a:spcAft>
             </a:pPr>
             <a:r>
-              <a:rPr sz="1823" b="0" i="0">
+              <a:rPr sz="1900" b="1" i="0">
                 <a:solidFill>
                   <a:srgbClr val="8EDBD4"/>
                 </a:solidFill>
                 <a:latin typeface="Arial"/>
               </a:rPr>
-              <a:t>C1-E04 | Physical-variable diagram</a:t>
-            </a:r>
-          </a:p>
-        </p:txBody>
-      </p:sp>
-      <p:sp>
-        <p:nvSpPr>
-          <p:cNvPr id="3" name="ellipse2" descr="sci-ppt:C1-E04-002"/>
+              <a:t>C1-E04 · Exact Eulerian and moving-point derivatives</a:t>
+            </a:r>
+          </a:p>
+        </p:txBody>
+      </p:sp>
+      <p:sp>
+        <p:nvSpPr>
+          <p:cNvPr id="3" name="C1-E04 round_rect 1" descr="sci-ppt:o001"/>
           <p:cNvSpPr/>
           <p:nvPr/>
         </p:nvSpPr>
         <p:spPr>
           <a:xfrm>
-            <a:off x="2072640" y="1402080"/>
-            <a:ext cx="2438400" cy="2438400"/>
+            <a:off x="365760" y="914400"/>
+            <a:ext cx="4023360" cy="4846320"/>
+          </a:xfrm>
+          <a:prstGeom prst="roundRect">
+            <a:avLst/>
+          </a:prstGeom>
+          <a:solidFill>
+            <a:srgbClr val="1E4A5A"/>
+          </a:solidFill>
+          <a:ln w="19050">
+            <a:solidFill>
+              <a:srgbClr val="2B6678"/>
+            </a:solidFill>
+          </a:ln>
+          <a:effectLst/>
+        </p:spPr>
+        <p:txBody>
+          <a:bodyPr rtlCol="0" anchor="ctr"/>
+          <a:lstStyle/>
+          <a:p>
+            <a:pPr algn="ctr"/>
+          </a:p>
+        </p:txBody>
+      </p:sp>
+      <p:sp>
+        <p:nvSpPr>
+          <p:cNvPr id="4" name="C1-E04 text 2" descr="sci-ppt:o002"/>
+          <p:cNvSpPr txBox="1"/>
+          <p:nvPr/>
+        </p:nvSpPr>
+        <p:spPr>
+          <a:xfrm>
+            <a:off x="502920" y="978408"/>
+            <a:ext cx="3749039" cy="262636"/>
+          </a:xfrm>
+          <a:prstGeom prst="rect">
+            <a:avLst/>
+          </a:prstGeom>
+          <a:noFill/>
+          <a:effectLst/>
+        </p:spPr>
+        <p:txBody>
+          <a:bodyPr wrap="none" lIns="18288" rIns="18288" tIns="18288" bIns="18288" anchor="t">
+            <a:spAutoFit/>
+          </a:bodyPr>
+          <a:lstStyle/>
+          <a:p>
+            <a:pPr algn="l">
+              <a:spcAft>
+                <a:spcPts val="0"/>
+              </a:spcAft>
+            </a:pPr>
+            <a:r>
+              <a:rPr sz="1400" b="1" i="0">
+                <a:solidFill>
+                  <a:srgbClr val="8EDBD4"/>
+                </a:solidFill>
+                <a:latin typeface="Arial"/>
+              </a:rPr>
+              <a:t>Two observers, one potential</a:t>
+            </a:r>
+          </a:p>
+        </p:txBody>
+      </p:sp>
+      <p:sp>
+        <p:nvSpPr>
+          <p:cNvPr id="5" name="C1-E04 ellipse 3" descr="sci-ppt:o003"/>
+          <p:cNvSpPr/>
+          <p:nvPr/>
+        </p:nvSpPr>
+        <p:spPr>
+          <a:xfrm>
+            <a:off x="1554480" y="2468880"/>
+            <a:ext cx="1463040" cy="1463040"/>
           </a:xfrm>
           <a:prstGeom prst="ellipse">
+            <a:avLst/>
+          </a:prstGeom>
+          <a:solidFill>
+            <a:srgbClr val="0C1820"/>
+          </a:solidFill>
+          <a:ln w="27940">
+            <a:solidFill>
+              <a:srgbClr val="F2B880"/>
+            </a:solidFill>
+          </a:ln>
+          <a:effectLst/>
+        </p:spPr>
+        <p:txBody>
+          <a:bodyPr rtlCol="0" anchor="ctr"/>
+          <a:lstStyle/>
+          <a:p>
+            <a:pPr algn="ctr"/>
+          </a:p>
+        </p:txBody>
+      </p:sp>
+      <p:sp>
+        <p:nvSpPr>
+          <p:cNvPr id="6" name="C1-E04 ellipse 4" descr="sci-ppt:o004"/>
+          <p:cNvSpPr/>
+          <p:nvPr/>
+        </p:nvSpPr>
+        <p:spPr>
+          <a:xfrm>
+            <a:off x="1335024" y="2249424"/>
+            <a:ext cx="1901952" cy="1901952"/>
+          </a:xfrm>
+          <a:prstGeom prst="ellipse">
+            <a:avLst/>
+          </a:prstGeom>
+          <a:noFill/>
+          <a:ln w="16510">
+            <a:solidFill>
+              <a:srgbClr val="F2B880">
+                <a:alpha val="70000"/>
+              </a:srgbClr>
+            </a:solidFill>
+          </a:ln>
+          <a:effectLst/>
+        </p:spPr>
+        <p:txBody>
+          <a:bodyPr rtlCol="0" anchor="ctr"/>
+          <a:lstStyle/>
+          <a:p>
+            <a:pPr algn="ctr"/>
+          </a:p>
+        </p:txBody>
+      </p:sp>
+      <p:cxnSp>
+        <p:nvCxnSpPr>
+          <p:cNvPr id="7" name="C1-E04 arrow 5" descr="sci-ppt:o005"/>
+          <p:cNvCxnSpPr/>
+          <p:nvPr/>
+        </p:nvCxnSpPr>
+        <p:spPr>
+          <a:xfrm flipV="1">
+            <a:off x="3017520" y="2066543"/>
+            <a:ext cx="402336" cy="402337"/>
+          </a:xfrm>
+          <a:prstGeom prst="line">
+            <a:avLst/>
+          </a:prstGeom>
+          <a:ln w="30480">
+            <a:solidFill>
+              <a:srgbClr val="F2B880"/>
+            </a:solidFill>
+            <a:headEnd type="none" w="med" len="med"/>
+            <a:tailEnd type="triangle" w="med" len="med"/>
+          </a:ln>
+          <a:effectLst/>
+        </p:spPr>
+      </p:cxnSp>
+      <p:sp>
+        <p:nvSpPr>
+          <p:cNvPr id="8" name="C1-E04 text 6" descr="sci-ppt:o006"/>
+          <p:cNvSpPr txBox="1"/>
+          <p:nvPr/>
+        </p:nvSpPr>
+        <p:spPr>
+          <a:xfrm>
+            <a:off x="2560320" y="1325880"/>
+            <a:ext cx="2103120" cy="231648"/>
+          </a:xfrm>
+          <a:prstGeom prst="rect">
+            <a:avLst/>
+          </a:prstGeom>
+          <a:noFill/>
+          <a:effectLst/>
+        </p:spPr>
+        <p:txBody>
+          <a:bodyPr wrap="none" lIns="18288" rIns="18288" tIns="18288" bIns="18288" anchor="t">
+            <a:spAutoFit/>
+          </a:bodyPr>
+          <a:lstStyle/>
+          <a:p>
+            <a:pPr algn="l">
+              <a:spcAft>
+                <a:spcPts val="0"/>
+              </a:spcAft>
+            </a:pPr>
+            <a:r>
+              <a:rPr sz="1200" b="0" i="0">
+                <a:solidFill>
+                  <a:srgbClr val="F2B880"/>
+                </a:solidFill>
+                <a:latin typeface="Arial"/>
+              </a:rPr>
+              <a:t>wall point moves outward</a:t>
+            </a:r>
+          </a:p>
+        </p:txBody>
+      </p:sp>
+      <p:sp>
+        <p:nvSpPr>
+          <p:cNvPr id="9" name="C1-E04 ellipse 7" descr="sci-ppt:o007"/>
+          <p:cNvSpPr/>
+          <p:nvPr/>
+        </p:nvSpPr>
+        <p:spPr>
+          <a:xfrm>
+            <a:off x="3931920" y="3840480"/>
+            <a:ext cx="182880" cy="182880"/>
+          </a:xfrm>
+          <a:prstGeom prst="ellipse">
+            <a:avLst/>
+          </a:prstGeom>
+          <a:solidFill>
+            <a:srgbClr val="8EDBD4"/>
+          </a:solidFill>
+          <a:ln w="12700">
+            <a:solidFill>
+              <a:srgbClr val="8EDBD4"/>
+            </a:solidFill>
+          </a:ln>
+          <a:effectLst/>
+        </p:spPr>
+        <p:txBody>
+          <a:bodyPr rtlCol="0" anchor="ctr"/>
+          <a:lstStyle/>
+          <a:p>
+            <a:pPr algn="ctr"/>
+          </a:p>
+        </p:txBody>
+      </p:sp>
+      <p:sp>
+        <p:nvSpPr>
+          <p:cNvPr id="10" name="C1-E04 text 8" descr="sci-ppt:o008"/>
+          <p:cNvSpPr txBox="1"/>
+          <p:nvPr/>
+        </p:nvSpPr>
+        <p:spPr>
+          <a:xfrm>
+            <a:off x="2926080" y="4096512"/>
+            <a:ext cx="1737360" cy="231648"/>
+          </a:xfrm>
+          <a:prstGeom prst="rect">
+            <a:avLst/>
+          </a:prstGeom>
+          <a:noFill/>
+          <a:effectLst/>
+        </p:spPr>
+        <p:txBody>
+          <a:bodyPr wrap="none" lIns="18288" rIns="18288" tIns="18288" bIns="18288" anchor="t">
+            <a:spAutoFit/>
+          </a:bodyPr>
+          <a:lstStyle/>
+          <a:p>
+            <a:pPr algn="l">
+              <a:spcAft>
+                <a:spcPts val="0"/>
+              </a:spcAft>
+            </a:pPr>
+            <a:r>
+              <a:rPr sz="1200" b="0" i="0">
+                <a:solidFill>
+                  <a:srgbClr val="8EDBD4"/>
+                </a:solidFill>
+                <a:latin typeface="Arial"/>
+              </a:rPr>
+              <a:t>fixed point r = 2R</a:t>
+            </a:r>
+          </a:p>
+        </p:txBody>
+      </p:sp>
+      <p:sp>
+        <p:nvSpPr>
+          <p:cNvPr id="11" name="C1-E04 text 9" descr="sci-ppt:o009"/>
+          <p:cNvSpPr txBox="1"/>
+          <p:nvPr/>
+        </p:nvSpPr>
+        <p:spPr>
+          <a:xfrm>
+            <a:off x="502920" y="4892040"/>
+            <a:ext cx="3749039" cy="626745"/>
+          </a:xfrm>
+          <a:prstGeom prst="rect">
+            <a:avLst/>
+          </a:prstGeom>
+          <a:noFill/>
+          <a:effectLst/>
+        </p:spPr>
+        <p:txBody>
+          <a:bodyPr wrap="none" lIns="18288" rIns="18288" tIns="18288" bIns="18288" anchor="t">
+            <a:spAutoFit/>
+          </a:bodyPr>
+          <a:lstStyle/>
+          <a:p>
+            <a:pPr algn="l">
+              <a:spcAft>
+                <a:spcPts val="0"/>
+              </a:spcAft>
+            </a:pPr>
+            <a:r>
+              <a:rPr sz="1250" b="0" i="0">
+                <a:solidFill>
+                  <a:srgbClr val="E7F0F3"/>
+                </a:solidFill>
+                <a:latin typeface="Arial"/>
+              </a:rPr>
+              <a:t>The fixed point feels φ change only because</a:t>
+            </a:r>
+          </a:p>
+          <a:p>
+            <a:pPr algn="l">
+              <a:spcAft>
+                <a:spcPts val="0"/>
+              </a:spcAft>
+            </a:pPr>
+            <a:r>
+              <a:rPr sz="1250" b="0" i="0">
+                <a:solidFill>
+                  <a:srgbClr val="E7F0F3"/>
+                </a:solidFill>
+                <a:latin typeface="Arial"/>
+              </a:rPr>
+              <a:t>R(t) changes. A point riding the wall also</a:t>
+            </a:r>
+          </a:p>
+          <a:p>
+            <a:pPr algn="l">
+              <a:spcAft>
+                <a:spcPts val="0"/>
+              </a:spcAft>
+            </a:pPr>
+            <a:r>
+              <a:rPr sz="1250" b="0" i="0">
+                <a:solidFill>
+                  <a:srgbClr val="E7F0F3"/>
+                </a:solidFill>
+                <a:latin typeface="Arial"/>
+              </a:rPr>
+              <a:t>moves to larger r.</a:t>
+            </a:r>
+          </a:p>
+        </p:txBody>
+      </p:sp>
+      <p:sp>
+        <p:nvSpPr>
+          <p:cNvPr id="12" name="C1-E04 text 10" descr="sci-ppt:o010"/>
+          <p:cNvSpPr txBox="1"/>
+          <p:nvPr/>
+        </p:nvSpPr>
+        <p:spPr>
+          <a:xfrm>
+            <a:off x="4754880" y="960120"/>
+            <a:ext cx="7040880" cy="262636"/>
+          </a:xfrm>
+          <a:prstGeom prst="rect">
+            <a:avLst/>
+          </a:prstGeom>
+          <a:noFill/>
+          <a:effectLst/>
+        </p:spPr>
+        <p:txBody>
+          <a:bodyPr wrap="none" lIns="18288" rIns="18288" tIns="18288" bIns="18288" anchor="t">
+            <a:spAutoFit/>
+          </a:bodyPr>
+          <a:lstStyle/>
+          <a:p>
+            <a:pPr algn="l">
+              <a:spcAft>
+                <a:spcPts val="0"/>
+              </a:spcAft>
+            </a:pPr>
+            <a:r>
+              <a:rPr sz="1400" b="1" i="0">
+                <a:solidFill>
+                  <a:srgbClr val="8EDBD4"/>
+                </a:solidFill>
+                <a:latin typeface="Arial"/>
+              </a:rPr>
+              <a:t>Three derivatives for R = 1, Ṙ = 1, R̈ = −0.5</a:t>
+            </a:r>
+          </a:p>
+        </p:txBody>
+      </p:sp>
+      <p:cxnSp>
+        <p:nvCxnSpPr>
+          <p:cNvPr id="13" name="C1-E04 line 11" descr="sci-ppt:o011"/>
+          <p:cNvCxnSpPr/>
+          <p:nvPr/>
+        </p:nvCxnSpPr>
+        <p:spPr>
+          <a:xfrm>
+            <a:off x="10424160" y="1463040"/>
+            <a:ext cx="0" cy="2743200"/>
+          </a:xfrm>
+          <a:prstGeom prst="line">
+            <a:avLst/>
+          </a:prstGeom>
+          <a:ln w="16510">
+            <a:solidFill>
+              <a:srgbClr val="B4C7D2"/>
+            </a:solidFill>
+          </a:ln>
+          <a:effectLst/>
+        </p:spPr>
+      </p:cxnSp>
+      <p:sp>
+        <p:nvSpPr>
+          <p:cNvPr id="14" name="C1-E04 text 12" descr="sci-ppt:o012"/>
+          <p:cNvSpPr txBox="1"/>
+          <p:nvPr/>
+        </p:nvSpPr>
+        <p:spPr>
+          <a:xfrm>
+            <a:off x="4754880" y="1691640"/>
+            <a:ext cx="2926080" cy="247142"/>
+          </a:xfrm>
+          <a:prstGeom prst="rect">
+            <a:avLst/>
+          </a:prstGeom>
+          <a:noFill/>
+          <a:effectLst/>
+        </p:spPr>
+        <p:txBody>
+          <a:bodyPr wrap="none" lIns="18288" rIns="18288" tIns="18288" bIns="18288" anchor="t">
+            <a:spAutoFit/>
+          </a:bodyPr>
+          <a:lstStyle/>
+          <a:p>
+            <a:pPr algn="l">
+              <a:spcAft>
+                <a:spcPts val="0"/>
+              </a:spcAft>
+            </a:pPr>
+            <a:r>
+              <a:rPr sz="1300" b="0" i="0">
+                <a:solidFill>
+                  <a:srgbClr val="E7F0F3"/>
+                </a:solidFill>
+                <a:latin typeface="Arial"/>
+              </a:rPr>
+              <a:t>∂φ/∂t at fixed r = 2R</a:t>
+            </a:r>
+          </a:p>
+        </p:txBody>
+      </p:sp>
+      <p:sp>
+        <p:nvSpPr>
+          <p:cNvPr id="15" name="C1-E04 rect 13" descr="sci-ppt:o013"/>
+          <p:cNvSpPr/>
+          <p:nvPr/>
+        </p:nvSpPr>
+        <p:spPr>
+          <a:xfrm>
+            <a:off x="9189720" y="1709928"/>
+            <a:ext cx="1234440" cy="411480"/>
+          </a:xfrm>
+          <a:prstGeom prst="rect">
+            <a:avLst/>
+          </a:prstGeom>
+          <a:solidFill>
+            <a:srgbClr val="8EDBD4"/>
+          </a:solidFill>
+          <a:ln w="12700">
+            <a:solidFill>
+              <a:srgbClr val="8EDBD4"/>
+            </a:solidFill>
+          </a:ln>
+          <a:effectLst/>
+        </p:spPr>
+        <p:txBody>
+          <a:bodyPr rtlCol="0" anchor="ctr"/>
+          <a:lstStyle/>
+          <a:p>
+            <a:pPr algn="ctr"/>
+          </a:p>
+        </p:txBody>
+      </p:sp>
+      <p:sp>
+        <p:nvSpPr>
+          <p:cNvPr id="16" name="C1-E04 text 14" descr="sci-ppt:o014"/>
+          <p:cNvSpPr txBox="1"/>
+          <p:nvPr/>
+        </p:nvSpPr>
+        <p:spPr>
+          <a:xfrm>
+            <a:off x="10533888" y="1737360"/>
+            <a:ext cx="822960" cy="247142"/>
+          </a:xfrm>
+          <a:prstGeom prst="rect">
+            <a:avLst/>
+          </a:prstGeom>
+          <a:noFill/>
+          <a:effectLst/>
+        </p:spPr>
+        <p:txBody>
+          <a:bodyPr wrap="none" lIns="18288" rIns="18288" tIns="18288" bIns="18288" anchor="t">
+            <a:spAutoFit/>
+          </a:bodyPr>
+          <a:lstStyle/>
+          <a:p>
+            <a:pPr algn="l">
+              <a:spcAft>
+                <a:spcPts val="0"/>
+              </a:spcAft>
+            </a:pPr>
+            <a:r>
+              <a:rPr sz="1300" b="1" i="0">
+                <a:solidFill>
+                  <a:srgbClr val="E7F0F3"/>
+                </a:solidFill>
+                <a:latin typeface="Arial"/>
+              </a:rPr>
+              <a:t>-0.75</a:t>
+            </a:r>
+          </a:p>
+        </p:txBody>
+      </p:sp>
+      <p:sp>
+        <p:nvSpPr>
+          <p:cNvPr id="17" name="C1-E04 text 15" descr="sci-ppt:o015"/>
+          <p:cNvSpPr txBox="1"/>
+          <p:nvPr/>
+        </p:nvSpPr>
+        <p:spPr>
+          <a:xfrm>
+            <a:off x="4754880" y="2560320"/>
+            <a:ext cx="2926080" cy="247142"/>
+          </a:xfrm>
+          <a:prstGeom prst="rect">
+            <a:avLst/>
+          </a:prstGeom>
+          <a:noFill/>
+          <a:effectLst/>
+        </p:spPr>
+        <p:txBody>
+          <a:bodyPr wrap="none" lIns="18288" rIns="18288" tIns="18288" bIns="18288" anchor="t">
+            <a:spAutoFit/>
+          </a:bodyPr>
+          <a:lstStyle/>
+          <a:p>
+            <a:pPr algn="l">
+              <a:spcAft>
+                <a:spcPts val="0"/>
+              </a:spcAft>
+            </a:pPr>
+            <a:r>
+              <a:rPr sz="1300" b="0" i="0">
+                <a:solidFill>
+                  <a:srgbClr val="E7F0F3"/>
+                </a:solidFill>
+                <a:latin typeface="Arial"/>
+              </a:rPr>
+              <a:t>∂φ/∂t at fixed r = R</a:t>
+            </a:r>
+          </a:p>
+        </p:txBody>
+      </p:sp>
+      <p:sp>
+        <p:nvSpPr>
+          <p:cNvPr id="18" name="C1-E04 rect 16" descr="sci-ppt:o016"/>
+          <p:cNvSpPr/>
+          <p:nvPr/>
+        </p:nvSpPr>
+        <p:spPr>
+          <a:xfrm>
+            <a:off x="7955279" y="2578608"/>
+            <a:ext cx="2468880" cy="411480"/>
+          </a:xfrm>
+          <a:prstGeom prst="rect">
+            <a:avLst/>
+          </a:prstGeom>
+          <a:solidFill>
+            <a:srgbClr val="7FC8F8"/>
+          </a:solidFill>
+          <a:ln w="12700">
+            <a:solidFill>
+              <a:srgbClr val="7FC8F8"/>
+            </a:solidFill>
+          </a:ln>
+          <a:effectLst/>
+        </p:spPr>
+        <p:txBody>
+          <a:bodyPr rtlCol="0" anchor="ctr"/>
+          <a:lstStyle/>
+          <a:p>
+            <a:pPr algn="ctr"/>
+          </a:p>
+        </p:txBody>
+      </p:sp>
+      <p:sp>
+        <p:nvSpPr>
+          <p:cNvPr id="19" name="C1-E04 text 17" descr="sci-ppt:o017"/>
+          <p:cNvSpPr txBox="1"/>
+          <p:nvPr/>
+        </p:nvSpPr>
+        <p:spPr>
+          <a:xfrm>
+            <a:off x="10533888" y="2606039"/>
+            <a:ext cx="822960" cy="247142"/>
+          </a:xfrm>
+          <a:prstGeom prst="rect">
+            <a:avLst/>
+          </a:prstGeom>
+          <a:noFill/>
+          <a:effectLst/>
+        </p:spPr>
+        <p:txBody>
+          <a:bodyPr wrap="none" lIns="18288" rIns="18288" tIns="18288" bIns="18288" anchor="t">
+            <a:spAutoFit/>
+          </a:bodyPr>
+          <a:lstStyle/>
+          <a:p>
+            <a:pPr algn="l">
+              <a:spcAft>
+                <a:spcPts val="0"/>
+              </a:spcAft>
+            </a:pPr>
+            <a:r>
+              <a:rPr sz="1300" b="1" i="0">
+                <a:solidFill>
+                  <a:srgbClr val="E7F0F3"/>
+                </a:solidFill>
+                <a:latin typeface="Arial"/>
+              </a:rPr>
+              <a:t>-1.50</a:t>
+            </a:r>
+          </a:p>
+        </p:txBody>
+      </p:sp>
+      <p:sp>
+        <p:nvSpPr>
+          <p:cNvPr id="20" name="C1-E04 text 18" descr="sci-ppt:o018"/>
+          <p:cNvSpPr txBox="1"/>
+          <p:nvPr/>
+        </p:nvSpPr>
+        <p:spPr>
+          <a:xfrm>
+            <a:off x="4754880" y="3429000"/>
+            <a:ext cx="2926080" cy="247142"/>
+          </a:xfrm>
+          <a:prstGeom prst="rect">
+            <a:avLst/>
+          </a:prstGeom>
+          <a:noFill/>
+          <a:effectLst/>
+        </p:spPr>
+        <p:txBody>
+          <a:bodyPr wrap="none" lIns="18288" rIns="18288" tIns="18288" bIns="18288" anchor="t">
+            <a:spAutoFit/>
+          </a:bodyPr>
+          <a:lstStyle/>
+          <a:p>
+            <a:pPr algn="l">
+              <a:spcAft>
+                <a:spcPts val="0"/>
+              </a:spcAft>
+            </a:pPr>
+            <a:r>
+              <a:rPr sz="1300" b="0" i="0">
+                <a:solidFill>
+                  <a:srgbClr val="E7F0F3"/>
+                </a:solidFill>
+                <a:latin typeface="Arial"/>
+              </a:rPr>
+              <a:t>dφ/dt following the wall</a:t>
+            </a:r>
+          </a:p>
+        </p:txBody>
+      </p:sp>
+      <p:sp>
+        <p:nvSpPr>
+          <p:cNvPr id="21" name="C1-E04 rect 19" descr="sci-ppt:o019"/>
+          <p:cNvSpPr/>
+          <p:nvPr/>
+        </p:nvSpPr>
+        <p:spPr>
+          <a:xfrm>
+            <a:off x="9601200" y="3447288"/>
+            <a:ext cx="822960" cy="411480"/>
+          </a:xfrm>
+          <a:prstGeom prst="rect">
+            <a:avLst/>
+          </a:prstGeom>
+          <a:solidFill>
+            <a:srgbClr val="F2B880"/>
+          </a:solidFill>
+          <a:ln w="12700">
+            <a:solidFill>
+              <a:srgbClr val="F2B880"/>
+            </a:solidFill>
+          </a:ln>
+          <a:effectLst/>
+        </p:spPr>
+        <p:txBody>
+          <a:bodyPr rtlCol="0" anchor="ctr"/>
+          <a:lstStyle/>
+          <a:p>
+            <a:pPr algn="ctr"/>
+          </a:p>
+        </p:txBody>
+      </p:sp>
+      <p:sp>
+        <p:nvSpPr>
+          <p:cNvPr id="22" name="C1-E04 text 20" descr="sci-ppt:o020"/>
+          <p:cNvSpPr txBox="1"/>
+          <p:nvPr/>
+        </p:nvSpPr>
+        <p:spPr>
+          <a:xfrm>
+            <a:off x="10533888" y="3474720"/>
+            <a:ext cx="822960" cy="247142"/>
+          </a:xfrm>
+          <a:prstGeom prst="rect">
+            <a:avLst/>
+          </a:prstGeom>
+          <a:noFill/>
+          <a:effectLst/>
+        </p:spPr>
+        <p:txBody>
+          <a:bodyPr wrap="none" lIns="18288" rIns="18288" tIns="18288" bIns="18288" anchor="t">
+            <a:spAutoFit/>
+          </a:bodyPr>
+          <a:lstStyle/>
+          <a:p>
+            <a:pPr algn="l">
+              <a:spcAft>
+                <a:spcPts val="0"/>
+              </a:spcAft>
+            </a:pPr>
+            <a:r>
+              <a:rPr sz="1300" b="1" i="0">
+                <a:solidFill>
+                  <a:srgbClr val="E7F0F3"/>
+                </a:solidFill>
+                <a:latin typeface="Arial"/>
+              </a:rPr>
+              <a:t>-0.50</a:t>
+            </a:r>
+          </a:p>
+        </p:txBody>
+      </p:sp>
+      <p:sp>
+        <p:nvSpPr>
+          <p:cNvPr id="23" name="C1-E04 round_rect 21" descr="sci-ppt:o021"/>
+          <p:cNvSpPr/>
+          <p:nvPr/>
+        </p:nvSpPr>
+        <p:spPr>
+          <a:xfrm>
+            <a:off x="4754880" y="4389120"/>
+            <a:ext cx="7040880" cy="1051560"/>
+          </a:xfrm>
+          <a:prstGeom prst="roundRect">
             <a:avLst/>
           </a:prstGeom>
           <a:solidFill>
             <a:srgbClr val="213E4B"/>
           </a:solidFill>
-          <a:ln w="21590">
+          <a:ln w="20320">
             <a:solidFill>
               <a:srgbClr val="B4C7D2"/>
             </a:solidFill>
@@ -3168,40 +3910,16 @@
           </a:p>
         </p:txBody>
       </p:sp>
-      <p:cxnSp>
-        <p:nvCxnSpPr>
-          <p:cNvPr id="4" name="arrow3" descr="sci-ppt:C1-E04-003"/>
-          <p:cNvCxnSpPr/>
-          <p:nvPr/>
-        </p:nvCxnSpPr>
-        <p:spPr>
-          <a:xfrm>
-            <a:off x="3291840" y="2621280"/>
-            <a:ext cx="1219200" cy="0"/>
-          </a:xfrm>
-          <a:prstGeom prst="line">
-            <a:avLst/>
-          </a:prstGeom>
-          <a:ln w="25400">
-            <a:solidFill>
-              <a:srgbClr val="8EDBD4"/>
-            </a:solidFill>
-            <a:headEnd type="none" w="med" len="med"/>
-            <a:tailEnd type="triangle" w="med" len="med"/>
-          </a:ln>
-          <a:effectLst/>
-        </p:spPr>
-      </p:cxnSp>
-      <p:sp>
-        <p:nvSpPr>
-          <p:cNvPr id="5" name="text4" descr="sci-ppt:C1-E04-004"/>
+      <p:sp>
+        <p:nvSpPr>
+          <p:cNvPr id="24" name="C1-E04 text 22" descr="sci-ppt:o022"/>
           <p:cNvSpPr txBox="1"/>
           <p:nvPr/>
         </p:nvSpPr>
         <p:spPr>
           <a:xfrm>
-            <a:off x="3474720" y="2133600"/>
-            <a:ext cx="1584960" cy="396849"/>
+            <a:off x="4892040" y="4462272"/>
+            <a:ext cx="6766560" cy="479551"/>
           </a:xfrm>
           <a:prstGeom prst="rect">
             <a:avLst/>
@@ -3210,7 +3928,7 @@
           <a:effectLst/>
         </p:spPr>
         <p:txBody>
-          <a:bodyPr wrap="none" lIns="27432" rIns="27432" tIns="18288" bIns="18288" anchor="ctr">
+          <a:bodyPr wrap="none" lIns="18288" rIns="18288" tIns="18288" bIns="18288" anchor="t">
             <a:spAutoFit/>
           </a:bodyPr>
           <a:lstStyle/>
@@ -3221,27 +3939,43 @@
               </a:spcAft>
             </a:pPr>
             <a:r>
-              <a:rPr sz="2016" b="0" i="0">
+              <a:rPr sz="1400" b="1" i="0">
                 <a:solidFill>
                   <a:srgbClr val="E7F0F3"/>
                 </a:solidFill>
                 <a:latin typeface="Arial"/>
               </a:rPr>
-              <a:t>R(t)</a:t>
-            </a:r>
-          </a:p>
-        </p:txBody>
-      </p:sp>
-      <p:sp>
-        <p:nvSpPr>
-          <p:cNvPr id="6" name="text5" descr="sci-ppt:C1-E04-005"/>
+              <a:t>Chain rule at the wall:   dφ/dt = ∂φ/∂t + Ṙ ∂φ/∂r</a:t>
+            </a:r>
+          </a:p>
+          <a:p>
+            <a:pPr algn="l">
+              <a:spcAft>
+                <a:spcPts val="0"/>
+              </a:spcAft>
+            </a:pPr>
+            <a:r>
+              <a:rPr sz="1400" b="1" i="0">
+                <a:solidFill>
+                  <a:srgbClr val="E7F0F3"/>
+                </a:solidFill>
+                <a:latin typeface="Arial"/>
+              </a:rPr>
+              <a:t>−0.5 = −1.5 + (1)(1)</a:t>
+            </a:r>
+          </a:p>
+        </p:txBody>
+      </p:sp>
+      <p:sp>
+        <p:nvSpPr>
+          <p:cNvPr id="25" name="C1-E04 text 23" descr="sci-ppt:o023"/>
           <p:cNvSpPr txBox="1"/>
           <p:nvPr/>
         </p:nvSpPr>
         <p:spPr>
           <a:xfrm>
-            <a:off x="2682240" y="2804160"/>
-            <a:ext cx="2194560" cy="377952"/>
+            <a:off x="4754880" y="5669280"/>
+            <a:ext cx="7040880" cy="448563"/>
           </a:xfrm>
           <a:prstGeom prst="rect">
             <a:avLst/>
@@ -3250,7 +3984,7 @@
           <a:effectLst/>
         </p:spPr>
         <p:txBody>
-          <a:bodyPr wrap="none" lIns="27432" rIns="27432" tIns="18288" bIns="18288" anchor="ctr">
+          <a:bodyPr wrap="none" lIns="18288" rIns="18288" tIns="18288" bIns="18288" anchor="t">
             <a:spAutoFit/>
           </a:bodyPr>
           <a:lstStyle/>
@@ -3261,27 +3995,43 @@
               </a:spcAft>
             </a:pPr>
             <a:r>
-              <a:rPr sz="1920" b="0" i="0">
+              <a:rPr sz="1300" b="0" i="0">
                 <a:solidFill>
-                  <a:srgbClr val="E7F0F3"/>
+                  <a:srgbClr val="F2B880"/>
                 </a:solidFill>
                 <a:latin typeface="Arial"/>
               </a:rPr>
-              <a:t>p_b</a:t>
-            </a:r>
-          </a:p>
-        </p:txBody>
-      </p:sp>
-      <p:sp>
-        <p:nvSpPr>
-          <p:cNvPr id="7" name="text6" descr="sci-ppt:C1-E04-006"/>
+              <a:t>Using the wrong derivative changes the wall pressure of Eq. C1-E05 by a whole Ṙ²</a:t>
+            </a:r>
+          </a:p>
+          <a:p>
+            <a:pPr algn="l">
+              <a:spcAft>
+                <a:spcPts val="0"/>
+              </a:spcAft>
+            </a:pPr>
+            <a:r>
+              <a:rPr sz="1300" b="0" i="0">
+                <a:solidFill>
+                  <a:srgbClr val="F2B880"/>
+                </a:solidFill>
+                <a:latin typeface="Arial"/>
+              </a:rPr>
+              <a:t>term.</a:t>
+            </a:r>
+          </a:p>
+        </p:txBody>
+      </p:sp>
+      <p:sp>
+        <p:nvSpPr>
+          <p:cNvPr id="26" name="C1-E04 text 24" descr="sci-ppt:o024"/>
           <p:cNvSpPr txBox="1"/>
           <p:nvPr/>
         </p:nvSpPr>
         <p:spPr>
           <a:xfrm>
-            <a:off x="5242560" y="1524000"/>
-            <a:ext cx="4876800" cy="415747"/>
+            <a:off x="320040" y="6510528"/>
+            <a:ext cx="11521440" cy="200660"/>
           </a:xfrm>
           <a:prstGeom prst="rect">
             <a:avLst/>
@@ -3290,7 +4040,7 @@
           <a:effectLst/>
         </p:spPr>
         <p:txBody>
-          <a:bodyPr wrap="none" lIns="27432" rIns="27432" tIns="18288" bIns="18288" anchor="ctr">
+          <a:bodyPr wrap="none" lIns="18288" rIns="18288" tIns="18288" bIns="18288" anchor="t">
             <a:spAutoFit/>
           </a:bodyPr>
           <a:lstStyle/>
@@ -3301,733 +4051,13 @@
               </a:spcAft>
             </a:pPr>
             <a:r>
-              <a:rPr sz="2111" b="0" i="0">
-                <a:solidFill>
-                  <a:srgbClr val="E7F0F3"/>
-                </a:solidFill>
-                <a:latin typeface="Arial"/>
-              </a:rPr>
-              <a:t>Surrounding liquid</a:t>
-            </a:r>
-          </a:p>
-        </p:txBody>
-      </p:sp>
-      <p:sp>
-        <p:nvSpPr>
-          <p:cNvPr id="8" name="text7" descr="sci-ppt:C1-E04-007"/>
-          <p:cNvSpPr txBox="1"/>
-          <p:nvPr/>
-        </p:nvSpPr>
-        <p:spPr>
-          <a:xfrm>
-            <a:off x="5242560" y="1987296"/>
-            <a:ext cx="5852160" cy="359054"/>
-          </a:xfrm>
-          <a:prstGeom prst="rect">
-            <a:avLst/>
-          </a:prstGeom>
-          <a:noFill/>
-          <a:effectLst/>
-        </p:spPr>
-        <p:txBody>
-          <a:bodyPr wrap="none" lIns="27432" rIns="27432" tIns="18288" bIns="18288" anchor="ctr">
-            <a:spAutoFit/>
-          </a:bodyPr>
-          <a:lstStyle/>
-          <a:p>
-            <a:pPr algn="l">
-              <a:spcAft>
-                <a:spcPts val="0"/>
-              </a:spcAft>
-            </a:pPr>
-            <a:r>
-              <a:rPr sz="1823" b="0" i="0">
-                <a:solidFill>
-                  <a:srgbClr val="E7F0F3"/>
-                </a:solidFill>
-                <a:latin typeface="Arial"/>
-              </a:rPr>
-              <a:t>p∞, ρ, μ; interface: σ</a:t>
-            </a:r>
-          </a:p>
-        </p:txBody>
-      </p:sp>
-      <p:cxnSp>
-        <p:nvCxnSpPr>
-          <p:cNvPr id="9" name="arrow8" descr="sci-ppt:C1-E04-008"/>
-          <p:cNvCxnSpPr/>
-          <p:nvPr/>
-        </p:nvCxnSpPr>
-        <p:spPr>
-          <a:xfrm>
-            <a:off x="3291840" y="2621280"/>
-            <a:ext cx="1706880" cy="1158240"/>
-          </a:xfrm>
-          <a:prstGeom prst="line">
-            <a:avLst/>
-          </a:prstGeom>
-          <a:ln w="25400">
-            <a:solidFill>
-              <a:srgbClr val="8EDBD4"/>
-            </a:solidFill>
-            <a:headEnd type="none" w="med" len="med"/>
-            <a:tailEnd type="triangle" w="med" len="med"/>
-          </a:ln>
-          <a:effectLst/>
-        </p:spPr>
-      </p:cxnSp>
-      <p:sp>
-        <p:nvSpPr>
-          <p:cNvPr id="10" name="text9" descr="sci-ppt:C1-E04-009"/>
-          <p:cNvSpPr txBox="1"/>
-          <p:nvPr/>
-        </p:nvSpPr>
-        <p:spPr>
-          <a:xfrm>
-            <a:off x="5364480" y="3657600"/>
-            <a:ext cx="1950720" cy="340156"/>
-          </a:xfrm>
-          <a:prstGeom prst="rect">
-            <a:avLst/>
-          </a:prstGeom>
-          <a:noFill/>
-          <a:effectLst/>
-        </p:spPr>
-        <p:txBody>
-          <a:bodyPr wrap="none" lIns="27432" rIns="27432" tIns="18288" bIns="18288" anchor="ctr">
-            <a:spAutoFit/>
-          </a:bodyPr>
-          <a:lstStyle/>
-          <a:p>
-            <a:pPr algn="l">
-              <a:spcAft>
-                <a:spcPts val="0"/>
-              </a:spcAft>
-            </a:pPr>
-            <a:r>
-              <a:rPr sz="1728" b="0" i="0">
-                <a:solidFill>
-                  <a:srgbClr val="E7F0F3"/>
-                </a:solidFill>
-                <a:latin typeface="Arial"/>
-              </a:rPr>
-              <a:t>r ≥ R</a:t>
-            </a:r>
-          </a:p>
-        </p:txBody>
-      </p:sp>
-      <p:cxnSp>
-        <p:nvCxnSpPr>
-          <p:cNvPr id="11" name="arrow10" descr="sci-ppt:C1-E04-010"/>
-          <p:cNvCxnSpPr/>
-          <p:nvPr/>
-        </p:nvCxnSpPr>
-        <p:spPr>
-          <a:xfrm>
-            <a:off x="4998720" y="2621280"/>
-            <a:ext cx="792480" cy="0"/>
-          </a:xfrm>
-          <a:prstGeom prst="line">
-            <a:avLst/>
-          </a:prstGeom>
-          <a:ln w="25400">
-            <a:solidFill>
-              <a:srgbClr val="8EDBD4"/>
-            </a:solidFill>
-            <a:headEnd type="none" w="med" len="med"/>
-            <a:tailEnd type="triangle" w="med" len="med"/>
-          </a:ln>
-          <a:effectLst/>
-        </p:spPr>
-      </p:cxnSp>
-      <p:sp>
-        <p:nvSpPr>
-          <p:cNvPr id="12" name="text11" descr="sci-ppt:C1-E04-011"/>
-          <p:cNvSpPr txBox="1"/>
-          <p:nvPr/>
-        </p:nvSpPr>
-        <p:spPr>
-          <a:xfrm>
-            <a:off x="5059680" y="2865120"/>
-            <a:ext cx="3291840" cy="321259"/>
-          </a:xfrm>
-          <a:prstGeom prst="rect">
-            <a:avLst/>
-          </a:prstGeom>
-          <a:noFill/>
-          <a:effectLst/>
-        </p:spPr>
-        <p:txBody>
-          <a:bodyPr wrap="none" lIns="27432" rIns="27432" tIns="18288" bIns="18288" anchor="ctr">
-            <a:spAutoFit/>
-          </a:bodyPr>
-          <a:lstStyle/>
-          <a:p>
-            <a:pPr algn="l">
-              <a:spcAft>
-                <a:spcPts val="0"/>
-              </a:spcAft>
-            </a:pPr>
-            <a:r>
-              <a:rPr sz="1632" b="0" i="0">
-                <a:solidFill>
-                  <a:srgbClr val="E7F0F3"/>
-                </a:solidFill>
-                <a:latin typeface="Arial"/>
-              </a:rPr>
-              <a:t>+e_r (coordinate)</a:t>
-            </a:r>
-          </a:p>
-        </p:txBody>
-      </p:sp>
-      <p:sp>
-        <p:nvSpPr>
-          <p:cNvPr id="13" name="text12" descr="sci-ppt:C1-E04-012"/>
-          <p:cNvSpPr txBox="1"/>
-          <p:nvPr/>
-        </p:nvSpPr>
-        <p:spPr>
-          <a:xfrm>
-            <a:off x="1219200" y="4206240"/>
-            <a:ext cx="9753600" cy="340156"/>
-          </a:xfrm>
-          <a:prstGeom prst="rect">
-            <a:avLst/>
-          </a:prstGeom>
-          <a:noFill/>
-          <a:effectLst/>
-        </p:spPr>
-        <p:txBody>
-          <a:bodyPr wrap="none" lIns="27432" rIns="27432" tIns="18288" bIns="18288" anchor="ctr">
-            <a:spAutoFit/>
-          </a:bodyPr>
-          <a:lstStyle/>
-          <a:p>
-            <a:pPr algn="l">
-              <a:spcAft>
-                <a:spcPts val="0"/>
-              </a:spcAft>
-            </a:pPr>
-            <a:r>
-              <a:rPr sz="1728" b="0" i="0">
-                <a:solidFill>
-                  <a:srgbClr val="E7F0F3"/>
-                </a:solidFill>
-                <a:latin typeface="Arial"/>
-              </a:rPr>
-              <a:t>Signed wall speed: Ṙ; acceleration: R̈</a:t>
-            </a:r>
-          </a:p>
-        </p:txBody>
-      </p:sp>
-      <p:sp>
-        <p:nvSpPr>
-          <p:cNvPr id="14" name="ellipse13" descr="sci-ppt:C1-E04-013"/>
-          <p:cNvSpPr/>
-          <p:nvPr/>
-        </p:nvSpPr>
-        <p:spPr>
-          <a:xfrm>
-            <a:off x="7254240" y="3596640"/>
-            <a:ext cx="121920" cy="121920"/>
-          </a:xfrm>
-          <a:prstGeom prst="ellipse">
-            <a:avLst/>
-          </a:prstGeom>
-          <a:solidFill>
-            <a:srgbClr val="F6BC77"/>
-          </a:solidFill>
-          <a:ln w="21590">
-            <a:solidFill>
-              <a:srgbClr val="B4C7D2"/>
-            </a:solidFill>
-          </a:ln>
-          <a:effectLst/>
-        </p:spPr>
-        <p:txBody>
-          <a:bodyPr rtlCol="0" anchor="ctr"/>
-          <a:lstStyle/>
-          <a:p>
-            <a:pPr algn="ctr"/>
-          </a:p>
-        </p:txBody>
-      </p:sp>
-      <p:sp>
-        <p:nvSpPr>
-          <p:cNvPr id="15" name="text14" descr="sci-ppt:C1-E04-014"/>
-          <p:cNvSpPr txBox="1"/>
-          <p:nvPr/>
-        </p:nvSpPr>
-        <p:spPr>
-          <a:xfrm>
-            <a:off x="7498079" y="4023360"/>
-            <a:ext cx="2438400" cy="340156"/>
-          </a:xfrm>
-          <a:prstGeom prst="rect">
-            <a:avLst/>
-          </a:prstGeom>
-          <a:noFill/>
-          <a:effectLst/>
-        </p:spPr>
-        <p:txBody>
-          <a:bodyPr wrap="none" lIns="27432" rIns="27432" tIns="18288" bIns="18288" anchor="ctr">
-            <a:spAutoFit/>
-          </a:bodyPr>
-          <a:lstStyle/>
-          <a:p>
-            <a:pPr algn="l">
-              <a:spcAft>
-                <a:spcPts val="0"/>
-              </a:spcAft>
-            </a:pPr>
-            <a:r>
-              <a:rPr sz="1728" b="0" i="0">
-                <a:solidFill>
-                  <a:srgbClr val="F6BC77"/>
-                </a:solidFill>
-                <a:latin typeface="Arial"/>
-              </a:rPr>
-              <a:t>Fixed r</a:t>
-            </a:r>
-          </a:p>
-        </p:txBody>
-      </p:sp>
-      <p:sp>
-        <p:nvSpPr>
-          <p:cNvPr id="16" name="text15" descr="sci-ppt:C1-E04-015"/>
-          <p:cNvSpPr txBox="1"/>
-          <p:nvPr/>
-        </p:nvSpPr>
-        <p:spPr>
-          <a:xfrm>
-            <a:off x="1219200" y="1036320"/>
-            <a:ext cx="7924799" cy="359054"/>
-          </a:xfrm>
-          <a:prstGeom prst="rect">
-            <a:avLst/>
-          </a:prstGeom>
-          <a:noFill/>
-          <a:effectLst/>
-        </p:spPr>
-        <p:txBody>
-          <a:bodyPr wrap="none" lIns="27432" rIns="27432" tIns="18288" bIns="18288" anchor="ctr">
-            <a:spAutoFit/>
-          </a:bodyPr>
-          <a:lstStyle/>
-          <a:p>
-            <a:pPr algn="l">
-              <a:spcAft>
-                <a:spcPts val="0"/>
-              </a:spcAft>
-            </a:pPr>
-            <a:r>
-              <a:rPr sz="1823" b="0" i="0">
-                <a:solidFill>
-                  <a:srgbClr val="E7F0F3"/>
-                </a:solidFill>
-                <a:latin typeface="Arial"/>
-              </a:rPr>
-              <a:t>Moving interface versus fixed observer</a:t>
-            </a:r>
-          </a:p>
-        </p:txBody>
-      </p:sp>
-      <p:sp>
-        <p:nvSpPr>
-          <p:cNvPr id="17" name="text16" descr="sci-ppt:C1-E04-016"/>
-          <p:cNvSpPr txBox="1"/>
-          <p:nvPr/>
-        </p:nvSpPr>
-        <p:spPr>
-          <a:xfrm>
-            <a:off x="365760" y="4974336"/>
-            <a:ext cx="5547360" cy="321259"/>
-          </a:xfrm>
-          <a:prstGeom prst="rect">
-            <a:avLst/>
-          </a:prstGeom>
-          <a:noFill/>
-          <a:effectLst/>
-        </p:spPr>
-        <p:txBody>
-          <a:bodyPr wrap="none" lIns="27432" rIns="27432" tIns="18288" bIns="18288" anchor="ctr">
-            <a:spAutoFit/>
-          </a:bodyPr>
-          <a:lstStyle/>
-          <a:p>
-            <a:pPr algn="l">
-              <a:spcAft>
-                <a:spcPts val="0"/>
-              </a:spcAft>
-            </a:pPr>
-            <a:r>
-              <a:rPr sz="1632" b="0" i="0">
-                <a:solidFill>
-                  <a:srgbClr val="E7F0F3"/>
-                </a:solidFill>
-                <a:latin typeface="Arial"/>
-              </a:rPr>
-              <a:t>Fixed r</a:t>
-            </a:r>
-          </a:p>
-        </p:txBody>
-      </p:sp>
-      <p:sp>
-        <p:nvSpPr>
-          <p:cNvPr id="18" name="text17" descr="sci-ppt:C1-E04-017"/>
-          <p:cNvSpPr txBox="1"/>
-          <p:nvPr/>
-        </p:nvSpPr>
-        <p:spPr>
-          <a:xfrm>
-            <a:off x="365760" y="5266944"/>
-            <a:ext cx="5547360" cy="321259"/>
-          </a:xfrm>
-          <a:prstGeom prst="rect">
-            <a:avLst/>
-          </a:prstGeom>
-          <a:noFill/>
-          <a:effectLst/>
-        </p:spPr>
-        <p:txBody>
-          <a:bodyPr wrap="none" lIns="27432" rIns="27432" tIns="18288" bIns="18288" anchor="ctr">
-            <a:spAutoFit/>
-          </a:bodyPr>
-          <a:lstStyle/>
-          <a:p>
-            <a:pPr algn="l">
-              <a:spcAft>
-                <a:spcPts val="0"/>
-              </a:spcAft>
-            </a:pPr>
-            <a:r>
-              <a:rPr sz="1632" b="0" i="0">
-                <a:solidFill>
-                  <a:srgbClr val="E7F0F3"/>
-                </a:solidFill>
-                <a:latin typeface="Arial"/>
-              </a:rPr>
-              <a:t>φ</a:t>
-            </a:r>
-          </a:p>
-        </p:txBody>
-      </p:sp>
-      <p:sp>
-        <p:nvSpPr>
-          <p:cNvPr id="19" name="text18" descr="sci-ppt:C1-E04-018"/>
-          <p:cNvSpPr txBox="1"/>
-          <p:nvPr/>
-        </p:nvSpPr>
-        <p:spPr>
-          <a:xfrm>
-            <a:off x="365760" y="5559552"/>
-            <a:ext cx="5547360" cy="321259"/>
-          </a:xfrm>
-          <a:prstGeom prst="rect">
-            <a:avLst/>
-          </a:prstGeom>
-          <a:noFill/>
-          <a:effectLst/>
-        </p:spPr>
-        <p:txBody>
-          <a:bodyPr wrap="none" lIns="27432" rIns="27432" tIns="18288" bIns="18288" anchor="ctr">
-            <a:spAutoFit/>
-          </a:bodyPr>
-          <a:lstStyle/>
-          <a:p>
-            <a:pPr algn="l">
-              <a:spcAft>
-                <a:spcPts val="0"/>
-              </a:spcAft>
-            </a:pPr>
-            <a:r>
-              <a:rPr sz="1632" b="0" i="0">
-                <a:solidFill>
-                  <a:srgbClr val="E7F0F3"/>
-                </a:solidFill>
-                <a:latin typeface="Arial"/>
-              </a:rPr>
-              <a:t>R̈</a:t>
-            </a:r>
-          </a:p>
-        </p:txBody>
-      </p:sp>
-      <p:sp>
-        <p:nvSpPr>
-          <p:cNvPr id="20" name="text19" descr="sci-ppt:C1-E04-019"/>
-          <p:cNvSpPr txBox="1"/>
-          <p:nvPr/>
-        </p:nvSpPr>
-        <p:spPr>
-          <a:xfrm>
-            <a:off x="365760" y="5852160"/>
-            <a:ext cx="5547360" cy="321259"/>
-          </a:xfrm>
-          <a:prstGeom prst="rect">
-            <a:avLst/>
-          </a:prstGeom>
-          <a:noFill/>
-          <a:effectLst/>
-        </p:spPr>
-        <p:txBody>
-          <a:bodyPr wrap="none" lIns="27432" rIns="27432" tIns="18288" bIns="18288" anchor="ctr">
-            <a:spAutoFit/>
-          </a:bodyPr>
-          <a:lstStyle/>
-          <a:p>
-            <a:pPr algn="l">
-              <a:spcAft>
-                <a:spcPts val="0"/>
-              </a:spcAft>
-            </a:pPr>
-            <a:r>
-              <a:rPr sz="1632" b="0" i="0">
-                <a:solidFill>
-                  <a:srgbClr val="E7F0F3"/>
-                </a:solidFill>
-                <a:latin typeface="Arial"/>
-              </a:rPr>
-              <a:t>dφ(R,t)/dt</a:t>
-            </a:r>
-          </a:p>
-        </p:txBody>
-      </p:sp>
-      <p:sp>
-        <p:nvSpPr>
-          <p:cNvPr id="21" name="text20" descr="sci-ppt:C1-E04-020"/>
-          <p:cNvSpPr txBox="1"/>
-          <p:nvPr/>
-        </p:nvSpPr>
-        <p:spPr>
-          <a:xfrm>
-            <a:off x="6156960" y="4974336"/>
-            <a:ext cx="5547360" cy="321259"/>
-          </a:xfrm>
-          <a:prstGeom prst="rect">
-            <a:avLst/>
-          </a:prstGeom>
-          <a:noFill/>
-          <a:effectLst/>
-        </p:spPr>
-        <p:txBody>
-          <a:bodyPr wrap="none" lIns="27432" rIns="27432" tIns="18288" bIns="18288" anchor="ctr">
-            <a:spAutoFit/>
-          </a:bodyPr>
-          <a:lstStyle/>
-          <a:p>
-            <a:pPr algn="l">
-              <a:spcAft>
-                <a:spcPts val="0"/>
-              </a:spcAft>
-            </a:pPr>
-            <a:r>
-              <a:rPr sz="1632" b="0" i="0">
-                <a:solidFill>
-                  <a:srgbClr val="E7F0F3"/>
-                </a:solidFill>
-                <a:latin typeface="Arial"/>
-              </a:rPr>
-              <a:t>Moving R(t)</a:t>
-            </a:r>
-          </a:p>
-        </p:txBody>
-      </p:sp>
-      <p:sp>
-        <p:nvSpPr>
-          <p:cNvPr id="22" name="text21" descr="sci-ppt:C1-E04-021"/>
-          <p:cNvSpPr txBox="1"/>
-          <p:nvPr/>
-        </p:nvSpPr>
-        <p:spPr>
-          <a:xfrm>
-            <a:off x="6156960" y="5266944"/>
-            <a:ext cx="5547360" cy="321259"/>
-          </a:xfrm>
-          <a:prstGeom prst="rect">
-            <a:avLst/>
-          </a:prstGeom>
-          <a:noFill/>
-          <a:effectLst/>
-        </p:spPr>
-        <p:txBody>
-          <a:bodyPr wrap="none" lIns="27432" rIns="27432" tIns="18288" bIns="18288" anchor="ctr">
-            <a:spAutoFit/>
-          </a:bodyPr>
-          <a:lstStyle/>
-          <a:p>
-            <a:pPr algn="l">
-              <a:spcAft>
-                <a:spcPts val="0"/>
-              </a:spcAft>
-            </a:pPr>
-            <a:r>
-              <a:rPr sz="1632" b="0" i="0">
-                <a:solidFill>
-                  <a:srgbClr val="E7F0F3"/>
-                </a:solidFill>
-                <a:latin typeface="Arial"/>
-              </a:rPr>
-              <a:t>Ṙ</a:t>
-            </a:r>
-          </a:p>
-        </p:txBody>
-      </p:sp>
-      <p:sp>
-        <p:nvSpPr>
-          <p:cNvPr id="23" name="text22" descr="sci-ppt:C1-E04-022"/>
-          <p:cNvSpPr txBox="1"/>
-          <p:nvPr/>
-        </p:nvSpPr>
-        <p:spPr>
-          <a:xfrm>
-            <a:off x="6156960" y="5559552"/>
-            <a:ext cx="5547360" cy="321259"/>
-          </a:xfrm>
-          <a:prstGeom prst="rect">
-            <a:avLst/>
-          </a:prstGeom>
-          <a:noFill/>
-          <a:effectLst/>
-        </p:spPr>
-        <p:txBody>
-          <a:bodyPr wrap="none" lIns="27432" rIns="27432" tIns="18288" bIns="18288" anchor="ctr">
-            <a:spAutoFit/>
-          </a:bodyPr>
-          <a:lstStyle/>
-          <a:p>
-            <a:pPr algn="l">
-              <a:spcAft>
-                <a:spcPts val="0"/>
-              </a:spcAft>
-            </a:pPr>
-            <a:r>
-              <a:rPr sz="1632" b="0" i="0">
-                <a:solidFill>
-                  <a:srgbClr val="E7F0F3"/>
-                </a:solidFill>
-                <a:latin typeface="Arial"/>
-              </a:rPr>
-              <a:t>∂tφ at fixed r</a:t>
-            </a:r>
-          </a:p>
-        </p:txBody>
-      </p:sp>
-      <p:sp>
-        <p:nvSpPr>
-          <p:cNvPr id="24" name="text23" descr="sci-ppt:C1-E04-023"/>
-          <p:cNvSpPr txBox="1"/>
-          <p:nvPr/>
-        </p:nvSpPr>
-        <p:spPr>
-          <a:xfrm>
-            <a:off x="6156960" y="5852160"/>
-            <a:ext cx="5547360" cy="321259"/>
-          </a:xfrm>
-          <a:prstGeom prst="rect">
-            <a:avLst/>
-          </a:prstGeom>
-          <a:noFill/>
-          <a:effectLst/>
-        </p:spPr>
-        <p:txBody>
-          <a:bodyPr wrap="none" lIns="27432" rIns="27432" tIns="18288" bIns="18288" anchor="ctr">
-            <a:spAutoFit/>
-          </a:bodyPr>
-          <a:lstStyle/>
-          <a:p>
-            <a:pPr algn="l">
-              <a:spcAft>
-                <a:spcPts val="0"/>
-              </a:spcAft>
-            </a:pPr>
-            <a:r>
-              <a:rPr sz="1632" b="0" i="0">
-                <a:solidFill>
-                  <a:srgbClr val="E7F0F3"/>
-                </a:solidFill>
-                <a:latin typeface="Arial"/>
-              </a:rPr>
-              <a:t>t</a:t>
-            </a:r>
-          </a:p>
-        </p:txBody>
-      </p:sp>
-      <p:sp>
-        <p:nvSpPr>
-          <p:cNvPr id="25" name="text24" descr="sci-ppt:C1-E04-024"/>
-          <p:cNvSpPr txBox="1"/>
-          <p:nvPr/>
-        </p:nvSpPr>
-        <p:spPr>
-          <a:xfrm>
-            <a:off x="365760" y="6339840"/>
-            <a:ext cx="11277600" cy="302361"/>
-          </a:xfrm>
-          <a:prstGeom prst="rect">
-            <a:avLst/>
-          </a:prstGeom>
-          <a:noFill/>
-          <a:effectLst/>
-        </p:spPr>
-        <p:txBody>
-          <a:bodyPr wrap="none" lIns="27432" rIns="27432" tIns="18288" bIns="18288" anchor="ctr">
-            <a:spAutoFit/>
-          </a:bodyPr>
-          <a:lstStyle/>
-          <a:p>
-            <a:pPr algn="l">
-              <a:spcAft>
-                <a:spcPts val="0"/>
-              </a:spcAft>
-            </a:pPr>
-            <a:r>
-              <a:rPr sz="1536" b="0" i="0">
+              <a:rPr sz="1000" b="0" i="0">
                 <a:solidFill>
                   <a:srgbClr val="B4C7D2"/>
                 </a:solidFill>
                 <a:latin typeface="Arial"/>
               </a:rPr>
-              <a:t>Take the partial derivative before setting r = R</a:t>
-            </a:r>
-          </a:p>
-        </p:txBody>
-      </p:sp>
-      <p:sp>
-        <p:nvSpPr>
-          <p:cNvPr id="26" name="text25" descr="sci-ppt:C1-E04-025"/>
-          <p:cNvSpPr txBox="1"/>
-          <p:nvPr/>
-        </p:nvSpPr>
-        <p:spPr>
-          <a:xfrm>
-            <a:off x="365760" y="6632448"/>
-            <a:ext cx="11277600" cy="302361"/>
-          </a:xfrm>
-          <a:prstGeom prst="rect">
-            <a:avLst/>
-          </a:prstGeom>
-          <a:noFill/>
-          <a:effectLst/>
-        </p:spPr>
-        <p:txBody>
-          <a:bodyPr wrap="none" lIns="27432" rIns="27432" tIns="18288" bIns="18288" anchor="ctr">
-            <a:spAutoFit/>
-          </a:bodyPr>
-          <a:lstStyle/>
-          <a:p>
-            <a:pPr algn="l">
-              <a:spcAft>
-                <a:spcPts val="0"/>
-              </a:spcAft>
-            </a:pPr>
-            <a:r>
-              <a:rPr sz="1536" b="0" i="0">
-                <a:solidFill>
-                  <a:srgbClr val="B4C7D2"/>
-                </a:solidFill>
-                <a:latin typeface="Arial"/>
-              </a:rPr>
-              <a:t>The moving-point derivative differs by Ṙ²</a:t>
+              <a:t>Values from Eq. C1-E04 with R = 1, Ṙ = 1, R̈ = −0.5 (units m² s⁻²).</a:t>
             </a:r>
           </a:p>
         </p:txBody>
